--- a/templates/sage_mist/KCLNLP_SageMist.pptx
+++ b/templates/sage_mist/KCLNLP_SageMist.pptx
@@ -3163,7 +3163,7 @@
           <a:p>
             <a:pPr algn="l"/>
             <a:r>
-              <a:rPr sz="4400" b="1" i="0">
+              <a:rPr sz="6000" b="1" i="0">
                 <a:solidFill>
                   <a:srgbClr val="2B2F2A"/>
                 </a:solidFill>
@@ -3198,7 +3198,7 @@
           <a:p>
             <a:pPr algn="l"/>
             <a:r>
-              <a:rPr sz="2200" b="0" i="1">
+              <a:rPr sz="3200" b="0" i="1">
                 <a:solidFill>
                   <a:srgbClr val="6F756C"/>
                 </a:solidFill>
@@ -3276,7 +3276,7 @@
           <a:p>
             <a:pPr algn="l"/>
             <a:r>
-              <a:rPr sz="1600" b="0" i="0">
+              <a:rPr sz="2200" b="0" i="0">
                 <a:solidFill>
                   <a:srgbClr val="2B2F2A"/>
                 </a:solidFill>
@@ -3383,7 +3383,7 @@
           <a:p>
             <a:pPr algn="l"/>
             <a:r>
-              <a:rPr sz="1400" b="0" i="1">
+              <a:rPr sz="2000" b="0" i="1">
                 <a:solidFill>
                   <a:srgbClr val="6F756C"/>
                 </a:solidFill>
@@ -3522,7 +3522,7 @@
           <a:p>
             <a:pPr algn="ctr"/>
             <a:r>
-              <a:rPr sz="4400" b="1" i="0">
+              <a:rPr sz="6000" b="1" i="0">
                 <a:solidFill>
                   <a:srgbClr val="2B2F2A"/>
                 </a:solidFill>
@@ -3557,7 +3557,7 @@
           <a:p>
             <a:pPr algn="ctr"/>
             <a:r>
-              <a:rPr sz="2200" b="0" i="1">
+              <a:rPr sz="3200" b="0" i="1">
                 <a:solidFill>
                   <a:srgbClr val="6F756C"/>
                 </a:solidFill>
@@ -3592,7 +3592,7 @@
           <a:p>
             <a:pPr algn="ctr"/>
             <a:r>
-              <a:rPr sz="1600" b="0" i="0">
+              <a:rPr sz="2200" b="0" i="0">
                 <a:solidFill>
                   <a:srgbClr val="2B2F2A"/>
                 </a:solidFill>
@@ -3699,7 +3699,7 @@
           <a:p>
             <a:pPr algn="l"/>
             <a:r>
-              <a:rPr sz="1400" b="0" i="1">
+              <a:rPr sz="2000" b="0" i="1">
                 <a:solidFill>
                   <a:srgbClr val="6F756C"/>
                 </a:solidFill>
@@ -3795,7 +3795,7 @@
           <a:p>
             <a:pPr algn="l"/>
             <a:r>
-              <a:rPr sz="7200" b="1" i="0">
+              <a:rPr sz="9600" b="1" i="0">
                 <a:solidFill>
                   <a:srgbClr val="5C7261"/>
                 </a:solidFill>
@@ -3865,7 +3865,7 @@
           <a:p>
             <a:pPr algn="l"/>
             <a:r>
-              <a:rPr sz="3600" b="1" i="0">
+              <a:rPr sz="4800" b="1" i="0">
                 <a:solidFill>
                   <a:srgbClr val="2B2F2A"/>
                 </a:solidFill>
@@ -3900,7 +3900,7 @@
           <a:p>
             <a:pPr algn="l"/>
             <a:r>
-              <a:rPr sz="1800" b="0" i="1">
+              <a:rPr sz="2400" b="0" i="1">
                 <a:solidFill>
                   <a:srgbClr val="6F756C"/>
                 </a:solidFill>
@@ -4007,7 +4007,7 @@
           <a:p>
             <a:pPr algn="l"/>
             <a:r>
-              <a:rPr sz="1400" b="0" i="1">
+              <a:rPr sz="2000" b="0" i="1">
                 <a:solidFill>
                   <a:srgbClr val="6F756C"/>
                 </a:solidFill>
@@ -4103,7 +4103,7 @@
           <a:p>
             <a:pPr algn="l"/>
             <a:r>
-              <a:rPr sz="2600" b="1" i="0">
+              <a:rPr sz="4000" b="1" i="0">
                 <a:solidFill>
                   <a:srgbClr val="2B2F2A"/>
                 </a:solidFill>
@@ -4185,7 +4185,7 @@
               </a:spcAft>
             </a:pPr>
             <a:r>
-              <a:rPr sz="2000">
+              <a:rPr sz="3000">
                 <a:solidFill>
                   <a:srgbClr val="2B2F2A"/>
                 </a:solidFill>
@@ -4201,7 +4201,7 @@
               </a:spcAft>
             </a:pPr>
             <a:r>
-              <a:rPr sz="2000">
+              <a:rPr sz="3000">
                 <a:solidFill>
                   <a:srgbClr val="2B2F2A"/>
                 </a:solidFill>
@@ -4217,7 +4217,7 @@
               </a:spcAft>
             </a:pPr>
             <a:r>
-              <a:rPr sz="2000">
+              <a:rPr sz="3000">
                 <a:solidFill>
                   <a:srgbClr val="2B2F2A"/>
                 </a:solidFill>
@@ -4233,7 +4233,7 @@
               </a:spcAft>
             </a:pPr>
             <a:r>
-              <a:rPr sz="2000">
+              <a:rPr sz="3000">
                 <a:solidFill>
                   <a:srgbClr val="2B2F2A"/>
                 </a:solidFill>
@@ -4249,7 +4249,7 @@
               </a:spcAft>
             </a:pPr>
             <a:r>
-              <a:rPr sz="2000">
+              <a:rPr sz="3000">
                 <a:solidFill>
                   <a:srgbClr val="2B2F2A"/>
                 </a:solidFill>
@@ -4356,7 +4356,7 @@
           <a:p>
             <a:pPr algn="l"/>
             <a:r>
-              <a:rPr sz="1400" b="0" i="1">
+              <a:rPr sz="2000" b="0" i="1">
                 <a:solidFill>
                   <a:srgbClr val="6F756C"/>
                 </a:solidFill>
@@ -4452,7 +4452,7 @@
           <a:p>
             <a:pPr algn="l"/>
             <a:r>
-              <a:rPr sz="2600" b="1" i="0">
+              <a:rPr sz="4000" b="1" i="0">
                 <a:solidFill>
                   <a:srgbClr val="2B2F2A"/>
                 </a:solidFill>
@@ -4534,7 +4534,7 @@
               </a:spcAft>
             </a:pPr>
             <a:r>
-              <a:rPr sz="2000">
+              <a:rPr sz="3000">
                 <a:solidFill>
                   <a:srgbClr val="2B2F2A"/>
                 </a:solidFill>
@@ -4550,7 +4550,7 @@
               </a:spcAft>
             </a:pPr>
             <a:r>
-              <a:rPr sz="2000">
+              <a:rPr sz="3000">
                 <a:solidFill>
                   <a:srgbClr val="2B2F2A"/>
                 </a:solidFill>
@@ -4566,7 +4566,7 @@
               </a:spcAft>
             </a:pPr>
             <a:r>
-              <a:rPr sz="2000">
+              <a:rPr sz="3000">
                 <a:solidFill>
                   <a:srgbClr val="2B2F2A"/>
                 </a:solidFill>
@@ -4687,7 +4687,7 @@
           <a:p>
             <a:pPr algn="l"/>
             <a:r>
-              <a:rPr sz="1100" b="1" i="0">
+              <a:rPr sz="1600" b="1" i="0">
                 <a:solidFill>
                   <a:srgbClr val="5C7261"/>
                 </a:solidFill>
@@ -4722,7 +4722,7 @@
           <a:p>
             <a:pPr algn="l"/>
             <a:r>
-              <a:rPr sz="1800" b="0" i="0">
+              <a:rPr sz="2400" b="0" i="0">
                 <a:solidFill>
                   <a:srgbClr val="2B2F2A"/>
                 </a:solidFill>
@@ -4829,7 +4829,7 @@
           <a:p>
             <a:pPr algn="l"/>
             <a:r>
-              <a:rPr sz="1400" b="0" i="1">
+              <a:rPr sz="2000" b="0" i="1">
                 <a:solidFill>
                   <a:srgbClr val="6F756C"/>
                 </a:solidFill>
@@ -4925,7 +4925,7 @@
           <a:p>
             <a:pPr algn="l"/>
             <a:r>
-              <a:rPr sz="2600" b="1" i="0">
+              <a:rPr sz="4000" b="1" i="0">
                 <a:solidFill>
                   <a:srgbClr val="2B2F2A"/>
                 </a:solidFill>
@@ -5003,7 +5003,7 @@
           <a:p>
             <a:pPr algn="l"/>
             <a:r>
-              <a:rPr sz="2800" b="1" i="0">
+              <a:rPr sz="4000" b="1" i="0">
                 <a:solidFill>
                   <a:srgbClr val="5C7261"/>
                 </a:solidFill>
@@ -5038,7 +5038,7 @@
           <a:p>
             <a:pPr algn="l"/>
             <a:r>
-              <a:rPr sz="2000" b="0" i="0">
+              <a:rPr sz="3000" b="0" i="0">
                 <a:solidFill>
                   <a:srgbClr val="2B2F2A"/>
                 </a:solidFill>
@@ -5108,7 +5108,7 @@
           <a:p>
             <a:pPr algn="l"/>
             <a:r>
-              <a:rPr sz="2800" b="1" i="0">
+              <a:rPr sz="4000" b="1" i="0">
                 <a:solidFill>
                   <a:srgbClr val="5C7261"/>
                 </a:solidFill>
@@ -5143,7 +5143,7 @@
           <a:p>
             <a:pPr algn="l"/>
             <a:r>
-              <a:rPr sz="2000" b="0" i="0">
+              <a:rPr sz="3000" b="0" i="0">
                 <a:solidFill>
                   <a:srgbClr val="2B2F2A"/>
                 </a:solidFill>
@@ -5213,7 +5213,7 @@
           <a:p>
             <a:pPr algn="l"/>
             <a:r>
-              <a:rPr sz="2800" b="1" i="0">
+              <a:rPr sz="4000" b="1" i="0">
                 <a:solidFill>
                   <a:srgbClr val="5C7261"/>
                 </a:solidFill>
@@ -5248,7 +5248,7 @@
           <a:p>
             <a:pPr algn="l"/>
             <a:r>
-              <a:rPr sz="2000" b="0" i="0">
+              <a:rPr sz="3000" b="0" i="0">
                 <a:solidFill>
                   <a:srgbClr val="2B2F2A"/>
                 </a:solidFill>
@@ -5390,7 +5390,7 @@
           <a:p>
             <a:pPr algn="l"/>
             <a:r>
-              <a:rPr sz="1400" b="0" i="1">
+              <a:rPr sz="2000" b="0" i="1">
                 <a:solidFill>
                   <a:srgbClr val="6F756C"/>
                 </a:solidFill>
@@ -5486,7 +5486,7 @@
           <a:p>
             <a:pPr algn="l"/>
             <a:r>
-              <a:rPr sz="2600" b="1" i="0">
+              <a:rPr sz="4000" b="1" i="0">
                 <a:solidFill>
                   <a:srgbClr val="2B2F2A"/>
                 </a:solidFill>
@@ -5607,7 +5607,7 @@
           <a:p>
             <a:pPr algn="ctr"/>
             <a:r>
-              <a:rPr sz="1800" b="0" i="1">
+              <a:rPr sz="2400" b="0" i="1">
                 <a:solidFill>
                   <a:srgbClr val="6F756C"/>
                 </a:solidFill>
@@ -5642,7 +5642,7 @@
           <a:p>
             <a:pPr algn="l"/>
             <a:r>
-              <a:rPr sz="2200" b="1" i="0">
+              <a:rPr sz="3000" b="1" i="0">
                 <a:solidFill>
                   <a:srgbClr val="2B2F2A"/>
                 </a:solidFill>
@@ -5681,7 +5681,7 @@
               </a:spcAft>
             </a:pPr>
             <a:r>
-              <a:rPr sz="1800">
+              <a:rPr sz="2800">
                 <a:solidFill>
                   <a:srgbClr val="2B2F2A"/>
                 </a:solidFill>
@@ -5697,7 +5697,7 @@
               </a:spcAft>
             </a:pPr>
             <a:r>
-              <a:rPr sz="1800">
+              <a:rPr sz="2800">
                 <a:solidFill>
                   <a:srgbClr val="2B2F2A"/>
                 </a:solidFill>
@@ -5713,7 +5713,7 @@
               </a:spcAft>
             </a:pPr>
             <a:r>
-              <a:rPr sz="1800">
+              <a:rPr sz="2800">
                 <a:solidFill>
                   <a:srgbClr val="2B2F2A"/>
                 </a:solidFill>
@@ -5820,7 +5820,7 @@
           <a:p>
             <a:pPr algn="l"/>
             <a:r>
-              <a:rPr sz="1400" b="0" i="1">
+              <a:rPr sz="2000" b="0" i="1">
                 <a:solidFill>
                   <a:srgbClr val="6F756C"/>
                 </a:solidFill>
@@ -5916,7 +5916,7 @@
           <a:p>
             <a:pPr algn="l"/>
             <a:r>
-              <a:rPr sz="12000" b="1" i="0">
+              <a:rPr sz="16000" b="1" i="0">
                 <a:solidFill>
                   <a:srgbClr val="A7B5A0"/>
                 </a:solidFill>
@@ -5951,7 +5951,7 @@
           <a:p>
             <a:pPr algn="l"/>
             <a:r>
-              <a:rPr sz="3600" b="0" i="1">
+              <a:rPr sz="4800" b="0" i="1">
                 <a:solidFill>
                   <a:srgbClr val="2B2F2A"/>
                 </a:solidFill>
@@ -6029,7 +6029,7 @@
           <a:p>
             <a:pPr algn="l"/>
             <a:r>
-              <a:rPr sz="1100" b="1" i="0">
+              <a:rPr sz="1600" b="1" i="0">
                 <a:solidFill>
                   <a:srgbClr val="5C7261"/>
                 </a:solidFill>
@@ -6136,7 +6136,7 @@
           <a:p>
             <a:pPr algn="l"/>
             <a:r>
-              <a:rPr sz="1400" b="0" i="1">
+              <a:rPr sz="2000" b="0" i="1">
                 <a:solidFill>
                   <a:srgbClr val="6F756C"/>
                 </a:solidFill>
@@ -6275,7 +6275,7 @@
           <a:p>
             <a:pPr algn="ctr"/>
             <a:r>
-              <a:rPr sz="5600" b="1" i="0">
+              <a:rPr sz="7200" b="1" i="0">
                 <a:solidFill>
                   <a:srgbClr val="2B2F2A"/>
                 </a:solidFill>
@@ -6310,7 +6310,7 @@
           <a:p>
             <a:pPr algn="ctr"/>
             <a:r>
-              <a:rPr sz="2200" b="0" i="1">
+              <a:rPr sz="3200" b="0" i="1">
                 <a:solidFill>
                   <a:srgbClr val="6F756C"/>
                 </a:solidFill>
@@ -6345,7 +6345,7 @@
           <a:p>
             <a:pPr algn="ctr"/>
             <a:r>
-              <a:rPr sz="1600" b="0" i="0">
+              <a:rPr sz="2200" b="0" i="0">
                 <a:solidFill>
                   <a:srgbClr val="2B2F2A"/>
                 </a:solidFill>
@@ -6452,7 +6452,7 @@
           <a:p>
             <a:pPr algn="l"/>
             <a:r>
-              <a:rPr sz="1400" b="0" i="1">
+              <a:rPr sz="2000" b="0" i="1">
                 <a:solidFill>
                   <a:srgbClr val="6F756C"/>
                 </a:solidFill>
